--- a/koreatech-db/6장_보여주기와_지키기.pptx
+++ b/koreatech-db/6장_보여주기와_지키기.pptx
@@ -3109,7 +3109,7 @@
       <p:grpSpPr/>
       <p:sp>
         <p:nvSpPr>
-          <p:cNvPr id="2" name="Oval 1"/>
+          <p:cNvPr id="2" name="deckgen:decor"/>
           <p:cNvSpPr/>
           <p:nvPr/>
         </p:nvSpPr>
@@ -3139,7 +3139,7 @@
       </p:sp>
       <p:sp>
         <p:nvSpPr>
-          <p:cNvPr id="3" name="Oval 2"/>
+          <p:cNvPr id="3" name="deckgen:decor"/>
           <p:cNvSpPr/>
           <p:nvPr/>
         </p:nvSpPr>
@@ -3169,7 +3169,7 @@
       </p:sp>
       <p:sp>
         <p:nvSpPr>
-          <p:cNvPr id="4" name="Oval 3"/>
+          <p:cNvPr id="4" name="deckgen:decor"/>
           <p:cNvSpPr/>
           <p:nvPr/>
         </p:nvSpPr>
@@ -3199,7 +3199,7 @@
       </p:sp>
       <p:sp>
         <p:nvSpPr>
-          <p:cNvPr id="5" name="Rectangle 4"/>
+          <p:cNvPr id="5" name="deckgen:decor"/>
           <p:cNvSpPr/>
           <p:nvPr/>
         </p:nvSpPr>
@@ -3229,7 +3229,7 @@
       </p:sp>
       <p:sp>
         <p:nvSpPr>
-          <p:cNvPr id="6" name="Oval 5"/>
+          <p:cNvPr id="6" name="deckgen:decor"/>
           <p:cNvSpPr/>
           <p:nvPr/>
         </p:nvSpPr>
@@ -3259,7 +3259,7 @@
       </p:sp>
       <p:sp>
         <p:nvSpPr>
-          <p:cNvPr id="7" name="Oval 6"/>
+          <p:cNvPr id="7" name="deckgen:decor"/>
           <p:cNvSpPr/>
           <p:nvPr/>
         </p:nvSpPr>
@@ -3289,7 +3289,7 @@
       </p:sp>
       <p:sp>
         <p:nvSpPr>
-          <p:cNvPr id="8" name="Oval 7"/>
+          <p:cNvPr id="8" name="deckgen:decor"/>
           <p:cNvSpPr/>
           <p:nvPr/>
         </p:nvSpPr>
@@ -3319,7 +3319,7 @@
       </p:sp>
       <p:sp>
         <p:nvSpPr>
-          <p:cNvPr id="9" name="Oval 8"/>
+          <p:cNvPr id="9" name="deckgen:decor"/>
           <p:cNvSpPr/>
           <p:nvPr/>
         </p:nvSpPr>
@@ -3349,7 +3349,7 @@
       </p:sp>
       <p:sp>
         <p:nvSpPr>
-          <p:cNvPr id="10" name="Rectangle 9"/>
+          <p:cNvPr id="10" name="deckgen:decor"/>
           <p:cNvSpPr/>
           <p:nvPr/>
         </p:nvSpPr>
@@ -3633,7 +3633,7 @@
       <p:grpSpPr/>
       <p:sp>
         <p:nvSpPr>
-          <p:cNvPr id="2" name="Oval 1"/>
+          <p:cNvPr id="2" name="deckgen:decor"/>
           <p:cNvSpPr/>
           <p:nvPr/>
         </p:nvSpPr>
@@ -3663,7 +3663,7 @@
       </p:sp>
       <p:sp>
         <p:nvSpPr>
-          <p:cNvPr id="3" name="Oval 2"/>
+          <p:cNvPr id="3" name="deckgen:decor"/>
           <p:cNvSpPr/>
           <p:nvPr/>
         </p:nvSpPr>
@@ -3693,7 +3693,7 @@
       </p:sp>
       <p:sp>
         <p:nvSpPr>
-          <p:cNvPr id="4" name="Oval 3"/>
+          <p:cNvPr id="4" name="deckgen:decor"/>
           <p:cNvSpPr/>
           <p:nvPr/>
         </p:nvSpPr>
@@ -5385,7 +5385,7 @@
       <p:grpSpPr/>
       <p:sp>
         <p:nvSpPr>
-          <p:cNvPr id="2" name="Oval 1"/>
+          <p:cNvPr id="2" name="deckgen:decor"/>
           <p:cNvSpPr/>
           <p:nvPr/>
         </p:nvSpPr>
@@ -5415,7 +5415,7 @@
       </p:sp>
       <p:sp>
         <p:nvSpPr>
-          <p:cNvPr id="3" name="Oval 2"/>
+          <p:cNvPr id="3" name="deckgen:decor"/>
           <p:cNvSpPr/>
           <p:nvPr/>
         </p:nvSpPr>
@@ -5445,7 +5445,7 @@
       </p:sp>
       <p:sp>
         <p:nvSpPr>
-          <p:cNvPr id="4" name="Oval 3"/>
+          <p:cNvPr id="4" name="deckgen:decor"/>
           <p:cNvSpPr/>
           <p:nvPr/>
         </p:nvSpPr>
@@ -6243,7 +6243,7 @@
                 <a:ea typeface="Pretendard"/>
                 <a:cs typeface="Pretendard"/>
               </a:rPr>
-              <a:t>고객 연락처가 비어 있지 않은가?</a:t>
+              <a:t>고객 이메일이 비어 있지 않은가?</a:t>
             </a:r>
           </a:p>
         </p:txBody>
@@ -6468,7 +6468,7 @@
                 <a:ea typeface="Pretendard"/>
                 <a:cs typeface="Pretendard"/>
               </a:rPr>
-              <a:t>주문 표와 배송 표의 고객명이 서로 같은가?</a:t>
+              <a:t>주문 표의 고객번호가 고객 표에 모두 있는가?</a:t>
             </a:r>
           </a:p>
         </p:txBody>
@@ -7321,7 +7321,7 @@
       <p:grpSpPr/>
       <p:sp>
         <p:nvSpPr>
-          <p:cNvPr id="2" name="Oval 1"/>
+          <p:cNvPr id="2" name="deckgen:decor"/>
           <p:cNvSpPr/>
           <p:nvPr/>
         </p:nvSpPr>
@@ -7351,7 +7351,7 @@
       </p:sp>
       <p:sp>
         <p:nvSpPr>
-          <p:cNvPr id="3" name="Oval 2"/>
+          <p:cNvPr id="3" name="deckgen:decor"/>
           <p:cNvSpPr/>
           <p:nvPr/>
         </p:nvSpPr>
@@ -7381,7 +7381,7 @@
       </p:sp>
       <p:sp>
         <p:nvSpPr>
-          <p:cNvPr id="4" name="Oval 3"/>
+          <p:cNvPr id="4" name="deckgen:decor"/>
           <p:cNvSpPr/>
           <p:nvPr/>
         </p:nvSpPr>
@@ -7587,7 +7587,7 @@
       </p:sp>
       <p:sp>
         <p:nvSpPr>
-          <p:cNvPr id="10" name="TextBox 9"/>
+          <p:cNvPr id="10" name="deckgen:ornament"/>
           <p:cNvSpPr txBox="1"/>
           <p:nvPr/>
         </p:nvSpPr>
@@ -7772,7 +7772,7 @@
       </p:sp>
       <p:sp>
         <p:nvSpPr>
-          <p:cNvPr id="14" name="TextBox 13"/>
+          <p:cNvPr id="14" name="deckgen:ornament"/>
           <p:cNvSpPr txBox="1"/>
           <p:nvPr/>
         </p:nvSpPr>
@@ -7847,7 +7847,7 @@
                 <a:ea typeface="Pretendard"/>
                 <a:cs typeface="Pretendard"/>
               </a:rPr>
-              <a:t>미입력 연락처 (완전성)</a:t>
+              <a:t>미입력 이메일 (완전성)</a:t>
             </a:r>
           </a:p>
           <a:p>
@@ -7868,7 +7868,7 @@
                 <a:ea typeface="Pretendard"/>
                 <a:cs typeface="Pretendard"/>
               </a:rPr>
-              <a:t>문자를 보낼 수 없어</a:t>
+              <a:t>안내 메일을 보낼 수 없어</a:t>
             </a:r>
           </a:p>
           <a:p>
@@ -7957,7 +7957,7 @@
       </p:sp>
       <p:sp>
         <p:nvSpPr>
-          <p:cNvPr id="18" name="TextBox 17"/>
+          <p:cNvPr id="18" name="deckgen:ornament"/>
           <p:cNvSpPr txBox="1"/>
           <p:nvPr/>
         </p:nvSpPr>
@@ -8142,7 +8142,7 @@
       </p:sp>
       <p:sp>
         <p:nvSpPr>
-          <p:cNvPr id="22" name="TextBox 21"/>
+          <p:cNvPr id="22" name="deckgen:ornament"/>
           <p:cNvSpPr txBox="1"/>
           <p:nvPr/>
         </p:nvSpPr>
@@ -8464,7 +8464,7 @@
       <p:grpSpPr/>
       <p:sp>
         <p:nvSpPr>
-          <p:cNvPr id="2" name="Oval 1"/>
+          <p:cNvPr id="2" name="deckgen:decor"/>
           <p:cNvSpPr/>
           <p:nvPr/>
         </p:nvSpPr>
@@ -8494,7 +8494,7 @@
       </p:sp>
       <p:sp>
         <p:nvSpPr>
-          <p:cNvPr id="3" name="Oval 2"/>
+          <p:cNvPr id="3" name="deckgen:decor"/>
           <p:cNvSpPr/>
           <p:nvPr/>
         </p:nvSpPr>
@@ -8524,7 +8524,7 @@
       </p:sp>
       <p:sp>
         <p:nvSpPr>
-          <p:cNvPr id="4" name="Oval 3"/>
+          <p:cNvPr id="4" name="deckgen:decor"/>
           <p:cNvSpPr/>
           <p:nvPr/>
         </p:nvSpPr>
@@ -8730,7 +8730,7 @@
       </p:sp>
       <p:sp>
         <p:nvSpPr>
-          <p:cNvPr id="10" name="TextBox 9"/>
+          <p:cNvPr id="10" name="deckgen:ornament"/>
           <p:cNvSpPr txBox="1"/>
           <p:nvPr/>
         </p:nvSpPr>
@@ -8915,7 +8915,7 @@
       </p:sp>
       <p:sp>
         <p:nvSpPr>
-          <p:cNvPr id="14" name="TextBox 13"/>
+          <p:cNvPr id="14" name="deckgen:ornament"/>
           <p:cNvSpPr txBox="1"/>
           <p:nvPr/>
         </p:nvSpPr>
@@ -9100,7 +9100,7 @@
       </p:sp>
       <p:sp>
         <p:nvSpPr>
-          <p:cNvPr id="18" name="TextBox 17"/>
+          <p:cNvPr id="18" name="deckgen:ornament"/>
           <p:cNvSpPr txBox="1"/>
           <p:nvPr/>
         </p:nvSpPr>
@@ -9422,7 +9422,7 @@
       <p:grpSpPr/>
       <p:sp>
         <p:nvSpPr>
-          <p:cNvPr id="2" name="Oval 1"/>
+          <p:cNvPr id="2" name="deckgen:decor"/>
           <p:cNvSpPr/>
           <p:nvPr/>
         </p:nvSpPr>
@@ -9452,7 +9452,7 @@
       </p:sp>
       <p:sp>
         <p:nvSpPr>
-          <p:cNvPr id="3" name="Oval 2"/>
+          <p:cNvPr id="3" name="deckgen:decor"/>
           <p:cNvSpPr/>
           <p:nvPr/>
         </p:nvSpPr>
@@ -9482,7 +9482,7 @@
       </p:sp>
       <p:sp>
         <p:nvSpPr>
-          <p:cNvPr id="4" name="Oval 3"/>
+          <p:cNvPr id="4" name="deckgen:decor"/>
           <p:cNvSpPr/>
           <p:nvPr/>
         </p:nvSpPr>
@@ -9688,7 +9688,7 @@
       </p:sp>
       <p:sp>
         <p:nvSpPr>
-          <p:cNvPr id="10" name="TextBox 9"/>
+          <p:cNvPr id="10" name="deckgen:ornament"/>
           <p:cNvSpPr txBox="1"/>
           <p:nvPr/>
         </p:nvSpPr>
@@ -9873,7 +9873,7 @@
       </p:sp>
       <p:sp>
         <p:nvSpPr>
-          <p:cNvPr id="14" name="TextBox 13"/>
+          <p:cNvPr id="14" name="deckgen:ornament"/>
           <p:cNvSpPr txBox="1"/>
           <p:nvPr/>
         </p:nvSpPr>
@@ -10195,7 +10195,7 @@
       <p:grpSpPr/>
       <p:sp>
         <p:nvSpPr>
-          <p:cNvPr id="2" name="Oval 1"/>
+          <p:cNvPr id="2" name="deckgen:decor"/>
           <p:cNvSpPr/>
           <p:nvPr/>
         </p:nvSpPr>
@@ -10225,7 +10225,7 @@
       </p:sp>
       <p:sp>
         <p:nvSpPr>
-          <p:cNvPr id="3" name="Oval 2"/>
+          <p:cNvPr id="3" name="deckgen:decor"/>
           <p:cNvSpPr/>
           <p:nvPr/>
         </p:nvSpPr>
@@ -10255,7 +10255,7 @@
       </p:sp>
       <p:sp>
         <p:nvSpPr>
-          <p:cNvPr id="4" name="Oval 3"/>
+          <p:cNvPr id="4" name="deckgen:decor"/>
           <p:cNvSpPr/>
           <p:nvPr/>
         </p:nvSpPr>
@@ -11583,7 +11583,7 @@
       <p:grpSpPr/>
       <p:sp>
         <p:nvSpPr>
-          <p:cNvPr id="2" name="Oval 1"/>
+          <p:cNvPr id="2" name="deckgen:decor"/>
           <p:cNvSpPr/>
           <p:nvPr/>
         </p:nvSpPr>
@@ -11613,7 +11613,7 @@
       </p:sp>
       <p:sp>
         <p:nvSpPr>
-          <p:cNvPr id="3" name="Oval 2"/>
+          <p:cNvPr id="3" name="deckgen:decor"/>
           <p:cNvSpPr/>
           <p:nvPr/>
         </p:nvSpPr>
@@ -11643,7 +11643,7 @@
       </p:sp>
       <p:sp>
         <p:nvSpPr>
-          <p:cNvPr id="4" name="Oval 3"/>
+          <p:cNvPr id="4" name="deckgen:decor"/>
           <p:cNvSpPr/>
           <p:nvPr/>
         </p:nvSpPr>
@@ -12572,7 +12572,7 @@
       <p:grpSpPr/>
       <p:sp>
         <p:nvSpPr>
-          <p:cNvPr id="2" name="Oval 1"/>
+          <p:cNvPr id="2" name="deckgen:decor"/>
           <p:cNvSpPr/>
           <p:nvPr/>
         </p:nvSpPr>
@@ -12602,7 +12602,7 @@
       </p:sp>
       <p:sp>
         <p:nvSpPr>
-          <p:cNvPr id="3" name="Oval 2"/>
+          <p:cNvPr id="3" name="deckgen:decor"/>
           <p:cNvSpPr/>
           <p:nvPr/>
         </p:nvSpPr>
@@ -12632,7 +12632,7 @@
       </p:sp>
       <p:sp>
         <p:nvSpPr>
-          <p:cNvPr id="4" name="Oval 3"/>
+          <p:cNvPr id="4" name="deckgen:decor"/>
           <p:cNvSpPr/>
           <p:nvPr/>
         </p:nvSpPr>
@@ -13164,7 +13164,7 @@
       <p:grpSpPr/>
       <p:sp>
         <p:nvSpPr>
-          <p:cNvPr id="2" name="Oval 1"/>
+          <p:cNvPr id="2" name="deckgen:decor"/>
           <p:cNvSpPr/>
           <p:nvPr/>
         </p:nvSpPr>
@@ -13194,7 +13194,7 @@
       </p:sp>
       <p:sp>
         <p:nvSpPr>
-          <p:cNvPr id="3" name="Oval 2"/>
+          <p:cNvPr id="3" name="deckgen:decor"/>
           <p:cNvSpPr/>
           <p:nvPr/>
         </p:nvSpPr>
@@ -13224,7 +13224,7 @@
       </p:sp>
       <p:sp>
         <p:nvSpPr>
-          <p:cNvPr id="4" name="Oval 3"/>
+          <p:cNvPr id="4" name="deckgen:decor"/>
           <p:cNvSpPr/>
           <p:nvPr/>
         </p:nvSpPr>
@@ -14435,7 +14435,7 @@
       <p:grpSpPr/>
       <p:sp>
         <p:nvSpPr>
-          <p:cNvPr id="2" name="Oval 1"/>
+          <p:cNvPr id="2" name="deckgen:decor"/>
           <p:cNvSpPr/>
           <p:nvPr/>
         </p:nvSpPr>
@@ -14465,7 +14465,7 @@
       </p:sp>
       <p:sp>
         <p:nvSpPr>
-          <p:cNvPr id="3" name="Oval 2"/>
+          <p:cNvPr id="3" name="deckgen:decor"/>
           <p:cNvSpPr/>
           <p:nvPr/>
         </p:nvSpPr>
@@ -14495,7 +14495,7 @@
       </p:sp>
       <p:sp>
         <p:nvSpPr>
-          <p:cNvPr id="4" name="Oval 3"/>
+          <p:cNvPr id="4" name="deckgen:decor"/>
           <p:cNvSpPr/>
           <p:nvPr/>
         </p:nvSpPr>
@@ -14701,7 +14701,7 @@
       </p:sp>
       <p:sp>
         <p:nvSpPr>
-          <p:cNvPr id="10" name="TextBox 9"/>
+          <p:cNvPr id="10" name="deckgen:ornament"/>
           <p:cNvSpPr txBox="1"/>
           <p:nvPr/>
         </p:nvSpPr>
@@ -14868,7 +14868,7 @@
       </p:sp>
       <p:sp>
         <p:nvSpPr>
-          <p:cNvPr id="14" name="TextBox 13"/>
+          <p:cNvPr id="14" name="deckgen:ornament"/>
           <p:cNvSpPr txBox="1"/>
           <p:nvPr/>
         </p:nvSpPr>
@@ -15035,7 +15035,7 @@
       </p:sp>
       <p:sp>
         <p:nvSpPr>
-          <p:cNvPr id="18" name="TextBox 17"/>
+          <p:cNvPr id="18" name="deckgen:ornament"/>
           <p:cNvSpPr txBox="1"/>
           <p:nvPr/>
         </p:nvSpPr>
@@ -15202,7 +15202,7 @@
       </p:sp>
       <p:sp>
         <p:nvSpPr>
-          <p:cNvPr id="22" name="TextBox 21"/>
+          <p:cNvPr id="22" name="deckgen:ornament"/>
           <p:cNvSpPr txBox="1"/>
           <p:nvPr/>
         </p:nvSpPr>
@@ -15369,7 +15369,7 @@
       </p:sp>
       <p:sp>
         <p:nvSpPr>
-          <p:cNvPr id="26" name="TextBox 25"/>
+          <p:cNvPr id="26" name="deckgen:ornament"/>
           <p:cNvSpPr txBox="1"/>
           <p:nvPr/>
         </p:nvSpPr>
@@ -15536,7 +15536,7 @@
       </p:sp>
       <p:sp>
         <p:nvSpPr>
-          <p:cNvPr id="30" name="TextBox 29"/>
+          <p:cNvPr id="30" name="deckgen:ornament"/>
           <p:cNvSpPr txBox="1"/>
           <p:nvPr/>
         </p:nvSpPr>
@@ -15769,7 +15769,7 @@
       <p:grpSpPr/>
       <p:sp>
         <p:nvSpPr>
-          <p:cNvPr id="2" name="Oval 1"/>
+          <p:cNvPr id="2" name="deckgen:decor"/>
           <p:cNvSpPr/>
           <p:nvPr/>
         </p:nvSpPr>
@@ -15799,7 +15799,7 @@
       </p:sp>
       <p:sp>
         <p:nvSpPr>
-          <p:cNvPr id="3" name="Oval 2"/>
+          <p:cNvPr id="3" name="deckgen:decor"/>
           <p:cNvSpPr/>
           <p:nvPr/>
         </p:nvSpPr>
@@ -15829,7 +15829,7 @@
       </p:sp>
       <p:sp>
         <p:nvSpPr>
-          <p:cNvPr id="4" name="Oval 3"/>
+          <p:cNvPr id="4" name="deckgen:decor"/>
           <p:cNvSpPr/>
           <p:nvPr/>
         </p:nvSpPr>
@@ -16896,7 +16896,7 @@
       <p:grpSpPr/>
       <p:sp>
         <p:nvSpPr>
-          <p:cNvPr id="2" name="Oval 1"/>
+          <p:cNvPr id="2" name="deckgen:decor"/>
           <p:cNvSpPr/>
           <p:nvPr/>
         </p:nvSpPr>
@@ -16926,7 +16926,7 @@
       </p:sp>
       <p:sp>
         <p:nvSpPr>
-          <p:cNvPr id="3" name="Oval 2"/>
+          <p:cNvPr id="3" name="deckgen:decor"/>
           <p:cNvSpPr/>
           <p:nvPr/>
         </p:nvSpPr>
@@ -17727,7 +17727,7 @@
       <p:grpSpPr/>
       <p:sp>
         <p:nvSpPr>
-          <p:cNvPr id="2" name="Oval 1"/>
+          <p:cNvPr id="2" name="deckgen:decor"/>
           <p:cNvSpPr/>
           <p:nvPr/>
         </p:nvSpPr>
@@ -17757,7 +17757,7 @@
       </p:sp>
       <p:sp>
         <p:nvSpPr>
-          <p:cNvPr id="3" name="Oval 2"/>
+          <p:cNvPr id="3" name="deckgen:decor"/>
           <p:cNvSpPr/>
           <p:nvPr/>
         </p:nvSpPr>
@@ -17787,7 +17787,7 @@
       </p:sp>
       <p:sp>
         <p:nvSpPr>
-          <p:cNvPr id="4" name="Oval 3"/>
+          <p:cNvPr id="4" name="deckgen:decor"/>
           <p:cNvSpPr/>
           <p:nvPr/>
         </p:nvSpPr>
@@ -18071,7 +18071,7 @@
         <p:spPr>
           <a:xfrm>
             <a:off x="2019300" y="4152900"/>
-            <a:ext cx="6096000" cy="323850"/>
+            <a:ext cx="6762750" cy="323850"/>
           </a:xfrm>
           <a:prstGeom prst="rect">
             <a:avLst/>
@@ -18105,48 +18105,7 @@
       </p:sp>
       <p:sp>
         <p:nvSpPr>
-          <p:cNvPr id="13" name="TextBox 12"/>
-          <p:cNvSpPr txBox="1"/>
-          <p:nvPr/>
-        </p:nvSpPr>
-        <p:spPr>
-          <a:xfrm>
-            <a:off x="8191500" y="4171950"/>
-            <a:ext cx="571500" cy="285750"/>
-          </a:xfrm>
-          <a:prstGeom prst="rect">
-            <a:avLst/>
-          </a:prstGeom>
-          <a:noFill/>
-        </p:spPr>
-        <p:txBody>
-          <a:bodyPr wrap="square" lIns="0" rIns="0" tIns="0" bIns="0" anchor="t">
-            <a:spAutoFit/>
-          </a:bodyPr>
-          <a:lstStyle/>
-          <a:p>
-            <a:pPr algn="r">
-              <a:lnSpc>
-                <a:spcPct val="100000"/>
-              </a:lnSpc>
-            </a:pPr>
-            <a:r>
-              <a:rPr sz="1650" b="1">
-                <a:solidFill>
-                  <a:srgbClr val="7D7D7D"/>
-                </a:solidFill>
-                <a:latin typeface="Pretendard"/>
-                <a:ea typeface="Pretendard"/>
-                <a:cs typeface="Pretendard"/>
-              </a:rPr>
-              <a:t/>
-            </a:r>
-          </a:p>
-        </p:txBody>
-      </p:sp>
-      <p:sp>
-        <p:nvSpPr>
-          <p:cNvPr id="14" name="Rounded Rectangle 13"/>
+          <p:cNvPr id="13" name="Rounded Rectangle 12"/>
           <p:cNvSpPr/>
           <p:nvPr/>
         </p:nvSpPr>
@@ -18180,7 +18139,7 @@
       </p:sp>
       <p:sp>
         <p:nvSpPr>
-          <p:cNvPr id="15" name="Rectangle 14"/>
+          <p:cNvPr id="14" name="Rectangle 13"/>
           <p:cNvSpPr/>
           <p:nvPr/>
         </p:nvSpPr>
@@ -18210,7 +18169,7 @@
       </p:sp>
       <p:sp>
         <p:nvSpPr>
-          <p:cNvPr id="16" name="Rectangle 15"/>
+          <p:cNvPr id="15" name="Rectangle 14"/>
           <p:cNvSpPr/>
           <p:nvPr/>
         </p:nvSpPr>
@@ -18240,7 +18199,7 @@
       </p:sp>
       <p:sp>
         <p:nvSpPr>
-          <p:cNvPr id="17" name="TextBox 16"/>
+          <p:cNvPr id="16" name="TextBox 15"/>
           <p:cNvSpPr txBox="1"/>
           <p:nvPr/>
         </p:nvSpPr>
@@ -18281,14 +18240,14 @@
       </p:sp>
       <p:sp>
         <p:nvSpPr>
-          <p:cNvPr id="18" name="TextBox 17"/>
+          <p:cNvPr id="17" name="TextBox 16"/>
           <p:cNvSpPr txBox="1"/>
           <p:nvPr/>
         </p:nvSpPr>
         <p:spPr>
           <a:xfrm>
             <a:off x="2019300" y="4876800"/>
-            <a:ext cx="6096000" cy="323850"/>
+            <a:ext cx="6762750" cy="323850"/>
           </a:xfrm>
           <a:prstGeom prst="rect">
             <a:avLst/>
@@ -18322,48 +18281,7 @@
       </p:sp>
       <p:sp>
         <p:nvSpPr>
-          <p:cNvPr id="19" name="TextBox 18"/>
-          <p:cNvSpPr txBox="1"/>
-          <p:nvPr/>
-        </p:nvSpPr>
-        <p:spPr>
-          <a:xfrm>
-            <a:off x="8191500" y="4895850"/>
-            <a:ext cx="571500" cy="285750"/>
-          </a:xfrm>
-          <a:prstGeom prst="rect">
-            <a:avLst/>
-          </a:prstGeom>
-          <a:noFill/>
-        </p:spPr>
-        <p:txBody>
-          <a:bodyPr wrap="square" lIns="0" rIns="0" tIns="0" bIns="0" anchor="t">
-            <a:spAutoFit/>
-          </a:bodyPr>
-          <a:lstStyle/>
-          <a:p>
-            <a:pPr algn="r">
-              <a:lnSpc>
-                <a:spcPct val="100000"/>
-              </a:lnSpc>
-            </a:pPr>
-            <a:r>
-              <a:rPr sz="1650" b="1">
-                <a:solidFill>
-                  <a:srgbClr val="7D7D7D"/>
-                </a:solidFill>
-                <a:latin typeface="Pretendard"/>
-                <a:ea typeface="Pretendard"/>
-                <a:cs typeface="Pretendard"/>
-              </a:rPr>
-              <a:t/>
-            </a:r>
-          </a:p>
-        </p:txBody>
-      </p:sp>
-      <p:sp>
-        <p:nvSpPr>
-          <p:cNvPr id="20" name="Rounded Rectangle 19"/>
+          <p:cNvPr id="18" name="Rounded Rectangle 17"/>
           <p:cNvSpPr/>
           <p:nvPr/>
         </p:nvSpPr>
@@ -18397,7 +18315,7 @@
       </p:sp>
       <p:sp>
         <p:nvSpPr>
-          <p:cNvPr id="21" name="Rectangle 20"/>
+          <p:cNvPr id="19" name="Rectangle 18"/>
           <p:cNvSpPr/>
           <p:nvPr/>
         </p:nvSpPr>
@@ -18427,7 +18345,7 @@
       </p:sp>
       <p:sp>
         <p:nvSpPr>
-          <p:cNvPr id="22" name="Rectangle 21"/>
+          <p:cNvPr id="20" name="Rectangle 19"/>
           <p:cNvSpPr/>
           <p:nvPr/>
         </p:nvSpPr>
@@ -18457,7 +18375,7 @@
       </p:sp>
       <p:sp>
         <p:nvSpPr>
-          <p:cNvPr id="23" name="TextBox 22"/>
+          <p:cNvPr id="21" name="TextBox 20"/>
           <p:cNvSpPr txBox="1"/>
           <p:nvPr/>
         </p:nvSpPr>
@@ -18498,14 +18416,14 @@
       </p:sp>
       <p:sp>
         <p:nvSpPr>
-          <p:cNvPr id="24" name="TextBox 23"/>
+          <p:cNvPr id="22" name="TextBox 21"/>
           <p:cNvSpPr txBox="1"/>
           <p:nvPr/>
         </p:nvSpPr>
         <p:spPr>
           <a:xfrm>
             <a:off x="2019300" y="5600700"/>
-            <a:ext cx="6096000" cy="323850"/>
+            <a:ext cx="6762750" cy="323850"/>
           </a:xfrm>
           <a:prstGeom prst="rect">
             <a:avLst/>
@@ -18539,48 +18457,7 @@
       </p:sp>
       <p:sp>
         <p:nvSpPr>
-          <p:cNvPr id="25" name="TextBox 24"/>
-          <p:cNvSpPr txBox="1"/>
-          <p:nvPr/>
-        </p:nvSpPr>
-        <p:spPr>
-          <a:xfrm>
-            <a:off x="8191500" y="5619750"/>
-            <a:ext cx="571500" cy="285750"/>
-          </a:xfrm>
-          <a:prstGeom prst="rect">
-            <a:avLst/>
-          </a:prstGeom>
-          <a:noFill/>
-        </p:spPr>
-        <p:txBody>
-          <a:bodyPr wrap="square" lIns="0" rIns="0" tIns="0" bIns="0" anchor="t">
-            <a:spAutoFit/>
-          </a:bodyPr>
-          <a:lstStyle/>
-          <a:p>
-            <a:pPr algn="r">
-              <a:lnSpc>
-                <a:spcPct val="100000"/>
-              </a:lnSpc>
-            </a:pPr>
-            <a:r>
-              <a:rPr sz="1650" b="1">
-                <a:solidFill>
-                  <a:srgbClr val="7D7D7D"/>
-                </a:solidFill>
-                <a:latin typeface="Pretendard"/>
-                <a:ea typeface="Pretendard"/>
-                <a:cs typeface="Pretendard"/>
-              </a:rPr>
-              <a:t/>
-            </a:r>
-          </a:p>
-        </p:txBody>
-      </p:sp>
-      <p:sp>
-        <p:nvSpPr>
-          <p:cNvPr id="26" name="Rounded Rectangle 25"/>
+          <p:cNvPr id="23" name="Rounded Rectangle 22"/>
           <p:cNvSpPr/>
           <p:nvPr/>
         </p:nvSpPr>
@@ -18614,7 +18491,7 @@
       </p:sp>
       <p:sp>
         <p:nvSpPr>
-          <p:cNvPr id="27" name="Rectangle 26"/>
+          <p:cNvPr id="24" name="Rectangle 23"/>
           <p:cNvSpPr/>
           <p:nvPr/>
         </p:nvSpPr>
@@ -18644,7 +18521,7 @@
       </p:sp>
       <p:sp>
         <p:nvSpPr>
-          <p:cNvPr id="28" name="Rectangle 27"/>
+          <p:cNvPr id="25" name="Rectangle 24"/>
           <p:cNvSpPr/>
           <p:nvPr/>
         </p:nvSpPr>
@@ -18674,7 +18551,7 @@
       </p:sp>
       <p:sp>
         <p:nvSpPr>
-          <p:cNvPr id="29" name="TextBox 28"/>
+          <p:cNvPr id="26" name="TextBox 25"/>
           <p:cNvSpPr txBox="1"/>
           <p:nvPr/>
         </p:nvSpPr>
@@ -18715,14 +18592,14 @@
       </p:sp>
       <p:sp>
         <p:nvSpPr>
-          <p:cNvPr id="30" name="TextBox 29"/>
+          <p:cNvPr id="27" name="TextBox 26"/>
           <p:cNvSpPr txBox="1"/>
           <p:nvPr/>
         </p:nvSpPr>
         <p:spPr>
           <a:xfrm>
             <a:off x="2019300" y="6324600"/>
-            <a:ext cx="6096000" cy="323850"/>
+            <a:ext cx="6762750" cy="323850"/>
           </a:xfrm>
           <a:prstGeom prst="rect">
             <a:avLst/>
@@ -18756,48 +18633,7 @@
       </p:sp>
       <p:sp>
         <p:nvSpPr>
-          <p:cNvPr id="31" name="TextBox 30"/>
-          <p:cNvSpPr txBox="1"/>
-          <p:nvPr/>
-        </p:nvSpPr>
-        <p:spPr>
-          <a:xfrm>
-            <a:off x="8191500" y="6343650"/>
-            <a:ext cx="571500" cy="285750"/>
-          </a:xfrm>
-          <a:prstGeom prst="rect">
-            <a:avLst/>
-          </a:prstGeom>
-          <a:noFill/>
-        </p:spPr>
-        <p:txBody>
-          <a:bodyPr wrap="square" lIns="0" rIns="0" tIns="0" bIns="0" anchor="t">
-            <a:spAutoFit/>
-          </a:bodyPr>
-          <a:lstStyle/>
-          <a:p>
-            <a:pPr algn="r">
-              <a:lnSpc>
-                <a:spcPct val="100000"/>
-              </a:lnSpc>
-            </a:pPr>
-            <a:r>
-              <a:rPr sz="1650" b="1">
-                <a:solidFill>
-                  <a:srgbClr val="7D7D7D"/>
-                </a:solidFill>
-                <a:latin typeface="Pretendard"/>
-                <a:ea typeface="Pretendard"/>
-                <a:cs typeface="Pretendard"/>
-              </a:rPr>
-              <a:t/>
-            </a:r>
-          </a:p>
-        </p:txBody>
-      </p:sp>
-      <p:sp>
-        <p:nvSpPr>
-          <p:cNvPr id="32" name="Rounded Rectangle 31"/>
+          <p:cNvPr id="28" name="Rounded Rectangle 27"/>
           <p:cNvSpPr/>
           <p:nvPr/>
         </p:nvSpPr>
@@ -18831,7 +18667,7 @@
       </p:sp>
       <p:sp>
         <p:nvSpPr>
-          <p:cNvPr id="33" name="Rectangle 32"/>
+          <p:cNvPr id="29" name="Rectangle 28"/>
           <p:cNvSpPr/>
           <p:nvPr/>
         </p:nvSpPr>
@@ -18861,7 +18697,7 @@
       </p:sp>
       <p:sp>
         <p:nvSpPr>
-          <p:cNvPr id="34" name="Rectangle 33"/>
+          <p:cNvPr id="30" name="Rectangle 29"/>
           <p:cNvSpPr/>
           <p:nvPr/>
         </p:nvSpPr>
@@ -18891,7 +18727,7 @@
       </p:sp>
       <p:sp>
         <p:nvSpPr>
-          <p:cNvPr id="35" name="TextBox 34"/>
+          <p:cNvPr id="31" name="TextBox 30"/>
           <p:cNvSpPr txBox="1"/>
           <p:nvPr/>
         </p:nvSpPr>
@@ -18932,14 +18768,14 @@
       </p:sp>
       <p:sp>
         <p:nvSpPr>
-          <p:cNvPr id="36" name="TextBox 35"/>
+          <p:cNvPr id="32" name="TextBox 31"/>
           <p:cNvSpPr txBox="1"/>
           <p:nvPr/>
         </p:nvSpPr>
         <p:spPr>
           <a:xfrm>
             <a:off x="10210800" y="4152900"/>
-            <a:ext cx="6096000" cy="323850"/>
+            <a:ext cx="6762750" cy="323850"/>
           </a:xfrm>
           <a:prstGeom prst="rect">
             <a:avLst/>
@@ -18973,48 +18809,7 @@
       </p:sp>
       <p:sp>
         <p:nvSpPr>
-          <p:cNvPr id="37" name="TextBox 36"/>
-          <p:cNvSpPr txBox="1"/>
-          <p:nvPr/>
-        </p:nvSpPr>
-        <p:spPr>
-          <a:xfrm>
-            <a:off x="16383000" y="4171950"/>
-            <a:ext cx="571500" cy="285750"/>
-          </a:xfrm>
-          <a:prstGeom prst="rect">
-            <a:avLst/>
-          </a:prstGeom>
-          <a:noFill/>
-        </p:spPr>
-        <p:txBody>
-          <a:bodyPr wrap="square" lIns="0" rIns="0" tIns="0" bIns="0" anchor="t">
-            <a:spAutoFit/>
-          </a:bodyPr>
-          <a:lstStyle/>
-          <a:p>
-            <a:pPr algn="r">
-              <a:lnSpc>
-                <a:spcPct val="100000"/>
-              </a:lnSpc>
-            </a:pPr>
-            <a:r>
-              <a:rPr sz="1650" b="1">
-                <a:solidFill>
-                  <a:srgbClr val="7D7D7D"/>
-                </a:solidFill>
-                <a:latin typeface="Pretendard"/>
-                <a:ea typeface="Pretendard"/>
-                <a:cs typeface="Pretendard"/>
-              </a:rPr>
-              <a:t/>
-            </a:r>
-          </a:p>
-        </p:txBody>
-      </p:sp>
-      <p:sp>
-        <p:nvSpPr>
-          <p:cNvPr id="38" name="Rounded Rectangle 37"/>
+          <p:cNvPr id="33" name="Rounded Rectangle 32"/>
           <p:cNvSpPr/>
           <p:nvPr/>
         </p:nvSpPr>
@@ -19048,7 +18843,7 @@
       </p:sp>
       <p:sp>
         <p:nvSpPr>
-          <p:cNvPr id="39" name="Rectangle 38"/>
+          <p:cNvPr id="34" name="Rectangle 33"/>
           <p:cNvSpPr/>
           <p:nvPr/>
         </p:nvSpPr>
@@ -19078,7 +18873,7 @@
       </p:sp>
       <p:sp>
         <p:nvSpPr>
-          <p:cNvPr id="40" name="Rectangle 39"/>
+          <p:cNvPr id="35" name="Rectangle 34"/>
           <p:cNvSpPr/>
           <p:nvPr/>
         </p:nvSpPr>
@@ -19108,7 +18903,7 @@
       </p:sp>
       <p:sp>
         <p:nvSpPr>
-          <p:cNvPr id="41" name="TextBox 40"/>
+          <p:cNvPr id="36" name="TextBox 35"/>
           <p:cNvSpPr txBox="1"/>
           <p:nvPr/>
         </p:nvSpPr>
@@ -19149,14 +18944,14 @@
       </p:sp>
       <p:sp>
         <p:nvSpPr>
-          <p:cNvPr id="42" name="TextBox 41"/>
+          <p:cNvPr id="37" name="TextBox 36"/>
           <p:cNvSpPr txBox="1"/>
           <p:nvPr/>
         </p:nvSpPr>
         <p:spPr>
           <a:xfrm>
             <a:off x="10210800" y="4876800"/>
-            <a:ext cx="6096000" cy="323850"/>
+            <a:ext cx="6762750" cy="323850"/>
           </a:xfrm>
           <a:prstGeom prst="rect">
             <a:avLst/>
@@ -19190,48 +18985,7 @@
       </p:sp>
       <p:sp>
         <p:nvSpPr>
-          <p:cNvPr id="43" name="TextBox 42"/>
-          <p:cNvSpPr txBox="1"/>
-          <p:nvPr/>
-        </p:nvSpPr>
-        <p:spPr>
-          <a:xfrm>
-            <a:off x="16383000" y="4895850"/>
-            <a:ext cx="571500" cy="285750"/>
-          </a:xfrm>
-          <a:prstGeom prst="rect">
-            <a:avLst/>
-          </a:prstGeom>
-          <a:noFill/>
-        </p:spPr>
-        <p:txBody>
-          <a:bodyPr wrap="square" lIns="0" rIns="0" tIns="0" bIns="0" anchor="t">
-            <a:spAutoFit/>
-          </a:bodyPr>
-          <a:lstStyle/>
-          <a:p>
-            <a:pPr algn="r">
-              <a:lnSpc>
-                <a:spcPct val="100000"/>
-              </a:lnSpc>
-            </a:pPr>
-            <a:r>
-              <a:rPr sz="1650" b="1">
-                <a:solidFill>
-                  <a:srgbClr val="7D7D7D"/>
-                </a:solidFill>
-                <a:latin typeface="Pretendard"/>
-                <a:ea typeface="Pretendard"/>
-                <a:cs typeface="Pretendard"/>
-              </a:rPr>
-              <a:t/>
-            </a:r>
-          </a:p>
-        </p:txBody>
-      </p:sp>
-      <p:sp>
-        <p:nvSpPr>
-          <p:cNvPr id="44" name="Rounded Rectangle 43"/>
+          <p:cNvPr id="38" name="Rounded Rectangle 37"/>
           <p:cNvSpPr/>
           <p:nvPr/>
         </p:nvSpPr>
@@ -19265,7 +19019,7 @@
       </p:sp>
       <p:sp>
         <p:nvSpPr>
-          <p:cNvPr id="45" name="Rectangle 44"/>
+          <p:cNvPr id="39" name="Rectangle 38"/>
           <p:cNvSpPr/>
           <p:nvPr/>
         </p:nvSpPr>
@@ -19295,7 +19049,7 @@
       </p:sp>
       <p:sp>
         <p:nvSpPr>
-          <p:cNvPr id="46" name="Rectangle 45"/>
+          <p:cNvPr id="40" name="Rectangle 39"/>
           <p:cNvSpPr/>
           <p:nvPr/>
         </p:nvSpPr>
@@ -19325,7 +19079,7 @@
       </p:sp>
       <p:sp>
         <p:nvSpPr>
-          <p:cNvPr id="47" name="TextBox 46"/>
+          <p:cNvPr id="41" name="TextBox 40"/>
           <p:cNvSpPr txBox="1"/>
           <p:nvPr/>
         </p:nvSpPr>
@@ -19366,14 +19120,14 @@
       </p:sp>
       <p:sp>
         <p:nvSpPr>
-          <p:cNvPr id="48" name="TextBox 47"/>
+          <p:cNvPr id="42" name="TextBox 41"/>
           <p:cNvSpPr txBox="1"/>
           <p:nvPr/>
         </p:nvSpPr>
         <p:spPr>
           <a:xfrm>
             <a:off x="10210800" y="5600700"/>
-            <a:ext cx="6096000" cy="323850"/>
+            <a:ext cx="6762750" cy="323850"/>
           </a:xfrm>
           <a:prstGeom prst="rect">
             <a:avLst/>
@@ -19407,48 +19161,7 @@
       </p:sp>
       <p:sp>
         <p:nvSpPr>
-          <p:cNvPr id="49" name="TextBox 48"/>
-          <p:cNvSpPr txBox="1"/>
-          <p:nvPr/>
-        </p:nvSpPr>
-        <p:spPr>
-          <a:xfrm>
-            <a:off x="16383000" y="5619750"/>
-            <a:ext cx="571500" cy="285750"/>
-          </a:xfrm>
-          <a:prstGeom prst="rect">
-            <a:avLst/>
-          </a:prstGeom>
-          <a:noFill/>
-        </p:spPr>
-        <p:txBody>
-          <a:bodyPr wrap="square" lIns="0" rIns="0" tIns="0" bIns="0" anchor="t">
-            <a:spAutoFit/>
-          </a:bodyPr>
-          <a:lstStyle/>
-          <a:p>
-            <a:pPr algn="r">
-              <a:lnSpc>
-                <a:spcPct val="100000"/>
-              </a:lnSpc>
-            </a:pPr>
-            <a:r>
-              <a:rPr sz="1650" b="1">
-                <a:solidFill>
-                  <a:srgbClr val="7D7D7D"/>
-                </a:solidFill>
-                <a:latin typeface="Pretendard"/>
-                <a:ea typeface="Pretendard"/>
-                <a:cs typeface="Pretendard"/>
-              </a:rPr>
-              <a:t/>
-            </a:r>
-          </a:p>
-        </p:txBody>
-      </p:sp>
-      <p:sp>
-        <p:nvSpPr>
-          <p:cNvPr id="50" name="Rectangle 49"/>
+          <p:cNvPr id="43" name="Rectangle 42"/>
           <p:cNvSpPr/>
           <p:nvPr/>
         </p:nvSpPr>
@@ -19478,7 +19191,7 @@
       </p:sp>
       <p:sp>
         <p:nvSpPr>
-          <p:cNvPr id="51" name="TextBox 50"/>
+          <p:cNvPr id="44" name="TextBox 43"/>
           <p:cNvSpPr txBox="1"/>
           <p:nvPr/>
         </p:nvSpPr>
@@ -19519,7 +19232,7 @@
       </p:sp>
       <p:sp>
         <p:nvSpPr>
-          <p:cNvPr id="52" name="TextBox 51"/>
+          <p:cNvPr id="45" name="TextBox 44"/>
           <p:cNvSpPr txBox="1"/>
           <p:nvPr/>
         </p:nvSpPr>
@@ -19578,7 +19291,7 @@
       <p:grpSpPr/>
       <p:sp>
         <p:nvSpPr>
-          <p:cNvPr id="2" name="Oval 1"/>
+          <p:cNvPr id="2" name="deckgen:decor"/>
           <p:cNvSpPr/>
           <p:nvPr/>
         </p:nvSpPr>
@@ -19608,7 +19321,7 @@
       </p:sp>
       <p:sp>
         <p:nvSpPr>
-          <p:cNvPr id="3" name="Oval 2"/>
+          <p:cNvPr id="3" name="deckgen:decor"/>
           <p:cNvSpPr/>
           <p:nvPr/>
         </p:nvSpPr>
@@ -19638,7 +19351,7 @@
       </p:sp>
       <p:sp>
         <p:nvSpPr>
-          <p:cNvPr id="4" name="Oval 3"/>
+          <p:cNvPr id="4" name="deckgen:decor"/>
           <p:cNvSpPr/>
           <p:nvPr/>
         </p:nvSpPr>
@@ -20639,7 +20352,7 @@
       <p:grpSpPr/>
       <p:sp>
         <p:nvSpPr>
-          <p:cNvPr id="2" name="Oval 1"/>
+          <p:cNvPr id="2" name="deckgen:decor"/>
           <p:cNvSpPr/>
           <p:nvPr/>
         </p:nvSpPr>
@@ -20669,7 +20382,7 @@
       </p:sp>
       <p:sp>
         <p:nvSpPr>
-          <p:cNvPr id="3" name="Oval 2"/>
+          <p:cNvPr id="3" name="deckgen:decor"/>
           <p:cNvSpPr/>
           <p:nvPr/>
         </p:nvSpPr>
@@ -20699,7 +20412,7 @@
       </p:sp>
       <p:sp>
         <p:nvSpPr>
-          <p:cNvPr id="4" name="Oval 3"/>
+          <p:cNvPr id="4" name="deckgen:decor"/>
           <p:cNvSpPr/>
           <p:nvPr/>
         </p:nvSpPr>
@@ -22391,7 +22104,7 @@
       <p:grpSpPr/>
       <p:sp>
         <p:nvSpPr>
-          <p:cNvPr id="2" name="Oval 1"/>
+          <p:cNvPr id="2" name="deckgen:decor"/>
           <p:cNvSpPr/>
           <p:nvPr/>
         </p:nvSpPr>
@@ -22421,7 +22134,7 @@
       </p:sp>
       <p:sp>
         <p:nvSpPr>
-          <p:cNvPr id="3" name="Oval 2"/>
+          <p:cNvPr id="3" name="deckgen:decor"/>
           <p:cNvSpPr/>
           <p:nvPr/>
         </p:nvSpPr>
@@ -22451,7 +22164,7 @@
       </p:sp>
       <p:sp>
         <p:nvSpPr>
-          <p:cNvPr id="4" name="Oval 3"/>
+          <p:cNvPr id="4" name="deckgen:decor"/>
           <p:cNvSpPr/>
           <p:nvPr/>
         </p:nvSpPr>
@@ -23518,7 +23231,7 @@
       <p:grpSpPr/>
       <p:sp>
         <p:nvSpPr>
-          <p:cNvPr id="2" name="Oval 1"/>
+          <p:cNvPr id="2" name="deckgen:decor"/>
           <p:cNvSpPr/>
           <p:nvPr/>
         </p:nvSpPr>
@@ -23548,7 +23261,7 @@
       </p:sp>
       <p:sp>
         <p:nvSpPr>
-          <p:cNvPr id="3" name="Oval 2"/>
+          <p:cNvPr id="3" name="deckgen:decor"/>
           <p:cNvSpPr/>
           <p:nvPr/>
         </p:nvSpPr>
@@ -23578,7 +23291,7 @@
       </p:sp>
       <p:sp>
         <p:nvSpPr>
-          <p:cNvPr id="4" name="Oval 3"/>
+          <p:cNvPr id="4" name="deckgen:decor"/>
           <p:cNvSpPr/>
           <p:nvPr/>
         </p:nvSpPr>
@@ -23795,7 +23508,7 @@
                 <a:ea typeface="Pretendard"/>
                 <a:cs typeface="Pretendard"/>
               </a:rPr>
-              <a:t>두 지점 9,500만 원 vs 1억 원 — 두 배 차이처럼 보인다</a:t>
+              <a:t>두 지점 9,500만 vs 1억 원(가정) — 두 배 차이처럼</a:t>
             </a:r>
           </a:p>
         </p:txBody>
@@ -24683,7 +24396,7 @@
       <p:grpSpPr/>
       <p:sp>
         <p:nvSpPr>
-          <p:cNvPr id="2" name="Oval 1"/>
+          <p:cNvPr id="2" name="deckgen:decor"/>
           <p:cNvSpPr/>
           <p:nvPr/>
         </p:nvSpPr>
@@ -24713,7 +24426,7 @@
       </p:sp>
       <p:sp>
         <p:nvSpPr>
-          <p:cNvPr id="3" name="Oval 2"/>
+          <p:cNvPr id="3" name="deckgen:decor"/>
           <p:cNvSpPr/>
           <p:nvPr/>
         </p:nvSpPr>
@@ -24743,7 +24456,7 @@
       </p:sp>
       <p:sp>
         <p:nvSpPr>
-          <p:cNvPr id="4" name="Oval 3"/>
+          <p:cNvPr id="4" name="deckgen:decor"/>
           <p:cNvSpPr/>
           <p:nvPr/>
         </p:nvSpPr>
@@ -24949,7 +24662,7 @@
       </p:sp>
       <p:sp>
         <p:nvSpPr>
-          <p:cNvPr id="10" name="TextBox 9"/>
+          <p:cNvPr id="10" name="deckgen:ornament"/>
           <p:cNvSpPr txBox="1"/>
           <p:nvPr/>
         </p:nvSpPr>
@@ -25134,7 +24847,7 @@
       </p:sp>
       <p:sp>
         <p:nvSpPr>
-          <p:cNvPr id="14" name="TextBox 13"/>
+          <p:cNvPr id="14" name="deckgen:ornament"/>
           <p:cNvSpPr txBox="1"/>
           <p:nvPr/>
         </p:nvSpPr>
@@ -25319,7 +25032,7 @@
       </p:sp>
       <p:sp>
         <p:nvSpPr>
-          <p:cNvPr id="18" name="TextBox 17"/>
+          <p:cNvPr id="18" name="deckgen:ornament"/>
           <p:cNvSpPr txBox="1"/>
           <p:nvPr/>
         </p:nvSpPr>
@@ -25504,7 +25217,7 @@
       </p:sp>
       <p:sp>
         <p:nvSpPr>
-          <p:cNvPr id="22" name="TextBox 21"/>
+          <p:cNvPr id="22" name="deckgen:ornament"/>
           <p:cNvSpPr txBox="1"/>
           <p:nvPr/>
         </p:nvSpPr>
@@ -25826,7 +25539,7 @@
       <p:grpSpPr/>
       <p:sp>
         <p:nvSpPr>
-          <p:cNvPr id="2" name="Oval 1"/>
+          <p:cNvPr id="2" name="deckgen:decor"/>
           <p:cNvSpPr/>
           <p:nvPr/>
         </p:nvSpPr>
@@ -25856,7 +25569,7 @@
       </p:sp>
       <p:sp>
         <p:nvSpPr>
-          <p:cNvPr id="3" name="Oval 2"/>
+          <p:cNvPr id="3" name="deckgen:decor"/>
           <p:cNvSpPr/>
           <p:nvPr/>
         </p:nvSpPr>
@@ -25886,7 +25599,7 @@
       </p:sp>
       <p:sp>
         <p:nvSpPr>
-          <p:cNvPr id="4" name="Oval 3"/>
+          <p:cNvPr id="4" name="deckgen:decor"/>
           <p:cNvSpPr/>
           <p:nvPr/>
         </p:nvSpPr>
@@ -26092,7 +25805,7 @@
       </p:sp>
       <p:sp>
         <p:nvSpPr>
-          <p:cNvPr id="10" name="TextBox 9"/>
+          <p:cNvPr id="10" name="deckgen:ornament"/>
           <p:cNvSpPr txBox="1"/>
           <p:nvPr/>
         </p:nvSpPr>
@@ -26277,7 +25990,7 @@
       </p:sp>
       <p:sp>
         <p:nvSpPr>
-          <p:cNvPr id="14" name="TextBox 13"/>
+          <p:cNvPr id="14" name="deckgen:ornament"/>
           <p:cNvSpPr txBox="1"/>
           <p:nvPr/>
         </p:nvSpPr>
@@ -26462,7 +26175,7 @@
       </p:sp>
       <p:sp>
         <p:nvSpPr>
-          <p:cNvPr id="18" name="TextBox 17"/>
+          <p:cNvPr id="18" name="deckgen:ornament"/>
           <p:cNvSpPr txBox="1"/>
           <p:nvPr/>
         </p:nvSpPr>
